--- a/slides/pptx/week19.pptx
+++ b/slides/pptx/week19.pptx
@@ -507,7 +507,7 @@
           <a:p>
             <a:r>
               <a:rPr lang="en-US" dirty="0"/>
-              <a:t>The finale — make it celebratory + high-energy. Before class: plant per-student/team flags, bring up all targets + CTFd, set the demo schedule. Confirm projects run. ~2 min.</a:t>
+              <a:t>The finale — make it celebratory + high-energy. Before class: graded flags for challenges 1–6 and 11 come from each student's own hosted instance (confirm everyone can log in and reach one); bring up the local targets for 7–10 and 12, open CTFd, set the demo schedule. Confirm projects run. ~2 min.</a:t>
             </a:r>
             <a:endParaRPr lang="en-US" dirty="0"/>
           </a:p>
